--- a/github-copilot-app-extensibility.pptx
+++ b/github-copilot-app-extensibility.pptx
@@ -3887,7 +3887,7 @@
           <a:p>
             <a:r>
               <a:rPr lang="en-US" dirty="0"/>
-              <a:t>Demo 0, dos minutos. Pregunta primero, sin tocar código: «What rules should I follow when I change the UI in this repo?». En el paso 0 el agente no encuentra reglas (no hay AGENTS.md, CLAUDE.md ni copilot-instructions.md) y contesta con consejos genéricos deducidos de la estructura de carpetas: una respuesta razonable que no conoce al equipo. Tarda unos 40 segundos, casi todo las dos confirmaciones de lectura que pide el agente. Segundo golpe, opcional: el botón Clear, el mismo prompt que cierra la charla. La ejecución tarda entre 30 segundos y dos minutos y medio; en las pruebas el botón ya salió con Name y AutomationId y a veces el agente ejecutó la app, así que no lo vendas como un mal resultado: que salga bien no es una garantía. Si vas justo de tiempo, enseña el resultado ya ejecutado (respaldo: demo0-rules.png y demo0-baseline.png). Vamos a ir cerrando esos huecos, de menos a más. Las slides claras como esta son siempre demos: en cada una está el prompt, lo que debe verse y el proyecto en el que se ejecuta.</a:t>
+              <a:t>Demo 0, dos minutos. Pregunta primero, sin tocar código: «What rules should I follow when I change the UI in this repo? Answer in at most five short bullets. If the repo states no rules, say so.». La última frase le pide que lo diga en vez de presentar como reglas lo que deduce del código (sin ella, a veces enumera convenciones inferidas del CSS). En el paso 0 el agente no encuentra reglas (no hay AGENTS.md, CLAUDE.md ni copilot-instructions.md) y contesta con consejos genéricos deducidos de la estructura de carpetas: una respuesta razonable que no conoce al equipo. Tarda unos 40 segundos, casi todo las dos confirmaciones de lectura que pide el agente. Segundo golpe, opcional: el botón Clear, el mismo prompt que cierra la charla. La ejecución tarda entre 30 segundos y dos minutos y medio; en las pruebas el botón ya salió con Name y AutomationId y a veces el agente ejecutó la app, así que no lo vendas como un mal resultado: que salga bien no es una garantía. Si vas justo de tiempo, enseña el resultado ya ejecutado (respaldo: demo0-rules.png y demo0-baseline.png). Vamos a ir cerrando esos huecos, de menos a más. Las slides claras como esta son siempre demos: en cada una está el prompt, lo que debe verse y el proyecto en el que se ejecuta.</a:t>
             </a:r>
             <a:endParaRPr lang="en-US" dirty="0"/>
           </a:p>
@@ -4063,7 +4063,7 @@
           <a:p>
             <a:r>
               <a:rPr lang="en-US" dirty="0"/>
-              <a:t>Demo 1, dos minutos. La misma pregunta y el mismo modelo, con otra respuesta: ahora el agente lista las reglas del equipo (Name y AutomationId iguales, PascalCase con el tipo de control, no cambiar un AutomationId existente, texto visible en inglés y el comando de compilación) porque lee .github/copilot-instructions.md al empezar la sesión. Antes tenía que adivinar y ahora lo sabe, y eso es lo que hay que subrayar. Segundo golpe, opcional: el botón Clear. El código puede salir igual que en la demo 0, pero ahora es una norma del repo y no depende de la suerte. Respaldo: demo1-rules.png. Si el agente dice que no recibió instrucciones, comprueba que respondiste al aviso de confianza y abre una sesión nueva (véase demos/01-instructions.txt). Mensaje de cierre: las instrucciones sirven para normas, no para procedimientos. Para procedimientos, el siguiente escalón.</a:t>
+              <a:t>Demo 1, dos minutos. La misma pregunta (con la misma frase final, «If the repo states no rules, say so.», que aquí no cambia nada porque el repo sí declara reglas) y el mismo modelo, con otra respuesta: ahora el agente lista las reglas del equipo (Name y AutomationId iguales, PascalCase con el tipo de control, no cambiar un AutomationId existente, texto visible en inglés y el comando de compilación) porque lee .github/copilot-instructions.md al empezar la sesión. Antes tenía que adivinar y ahora lo sabe, y eso es lo que hay que subrayar. Segundo golpe, opcional: el botón Clear. El código puede salir igual que en la demo 0, pero ahora es una norma del repo y no depende de la suerte. Respaldo: demo1-rules.png. Si el agente dice que no recibió instrucciones, comprueba que respondiste al aviso de confianza y abre una sesión nueva (véase demos/01-instructions.txt). Mensaje de cierre: las instrucciones sirven para normas, no para procedimientos. Para procedimientos, el siguiente escalón.</a:t>
             </a:r>
             <a:endParaRPr lang="en-US" dirty="0"/>
           </a:p>
@@ -36908,7 +36908,7 @@
         <p:spPr>
           <a:xfrm>
             <a:off x="5583783" y="2550071"/>
-            <a:ext cx="5707659" cy="482600"/>
+            <a:ext cx="5707659" cy="685800"/>
           </a:xfrm>
           <a:prstGeom prst="rect">
             <a:avLst/>
@@ -36937,7 +36937,7 @@
                 <a:ea typeface="JetBrains Mono" pitchFamily="49" charset="-122"/>
                 <a:cs typeface="JetBrains Mono" pitchFamily="49" charset="-120"/>
               </a:rPr>
-              <a:t>What rules should I follow when I change the UI in this repo? Answer in at most five short bullets.</a:t>
+              <a:t>What rules should I follow when I change the UI in this repo? Answer in at most five short bullets. If the repo states no rules, say so.</a:t>
             </a:r>
             <a:endParaRPr lang="en-US" sz="1200" dirty="0"/>
           </a:p>
@@ -36958,7 +36958,7 @@
         </p:blipFill>
         <p:spPr>
           <a:xfrm>
-            <a:off x="5583783" y="3108871"/>
+            <a:off x="5583783" y="3337471"/>
             <a:ext cx="5541417" cy="6350"/>
           </a:xfrm>
           <a:prstGeom prst="rect">
@@ -36974,7 +36974,7 @@
         </p:nvSpPr>
         <p:spPr>
           <a:xfrm>
-            <a:off x="5583783" y="3216821"/>
+            <a:off x="5583783" y="3445421"/>
             <a:ext cx="5707659" cy="238720"/>
           </a:xfrm>
           <a:prstGeom prst="rect">
@@ -37018,7 +37018,7 @@
         </p:nvSpPr>
         <p:spPr>
           <a:xfrm>
-            <a:off x="5583783" y="3531741"/>
+            <a:off x="5583783" y="3760341"/>
             <a:ext cx="5707659" cy="558800"/>
           </a:xfrm>
           <a:prstGeom prst="rect">
@@ -38221,7 +38221,7 @@
         <p:spPr>
           <a:xfrm>
             <a:off x="5583783" y="2550071"/>
-            <a:ext cx="5707659" cy="482600"/>
+            <a:ext cx="5707659" cy="685800"/>
           </a:xfrm>
           <a:prstGeom prst="rect">
             <a:avLst/>
@@ -38250,7 +38250,7 @@
                 <a:ea typeface="JetBrains Mono" pitchFamily="49" charset="-122"/>
                 <a:cs typeface="JetBrains Mono" pitchFamily="49" charset="-120"/>
               </a:rPr>
-              <a:t>What rules should I follow when I change the UI in this repo? Answer in at most five short bullets.</a:t>
+              <a:t>What rules should I follow when I change the UI in this repo? Answer in at most five short bullets. If the repo states no rules, say so.</a:t>
             </a:r>
             <a:endParaRPr lang="en-US" sz="1200" dirty="0"/>
           </a:p>
@@ -38271,7 +38271,7 @@
         </p:blipFill>
         <p:spPr>
           <a:xfrm>
-            <a:off x="5583783" y="3108871"/>
+            <a:off x="5583783" y="3337471"/>
             <a:ext cx="5541417" cy="6350"/>
           </a:xfrm>
           <a:prstGeom prst="rect">
@@ -38287,7 +38287,7 @@
         </p:nvSpPr>
         <p:spPr>
           <a:xfrm>
-            <a:off x="5583783" y="3216821"/>
+            <a:off x="5583783" y="3445421"/>
             <a:ext cx="5707659" cy="238720"/>
           </a:xfrm>
           <a:prstGeom prst="rect">
@@ -38331,7 +38331,7 @@
         </p:nvSpPr>
         <p:spPr>
           <a:xfrm>
-            <a:off x="5583783" y="3531741"/>
+            <a:off x="5583783" y="3760341"/>
             <a:ext cx="5707659" cy="558800"/>
           </a:xfrm>
           <a:prstGeom prst="rect">

--- a/github-copilot-app-extensibility.pptx
+++ b/github-copilot-app-extensibility.pptx
@@ -4063,7 +4063,7 @@
           <a:p>
             <a:r>
               <a:rPr lang="en-US" dirty="0"/>
-              <a:t>Demo 1, dos minutos. La misma pregunta (con la misma frase final, «If the repo states no rules, say so.», que aquí no cambia nada porque el repo sí declara reglas) y el mismo modelo, con otra respuesta: ahora el agente lista las reglas del equipo (Name y AutomationId iguales, PascalCase con el tipo de control, no cambiar un AutomationId existente, texto visible en inglés y el comando de compilación) porque lee .github/copilot-instructions.md al empezar la sesión. Antes tenía que adivinar y ahora lo sabe, y eso es lo que hay que subrayar. Segundo golpe, opcional: el botón Clear. El código puede salir igual que en la demo 0, pero ahora es una norma del repo y no depende de la suerte. Respaldo: demo1-rules.png. Si el agente dice que no recibió instrucciones, comprueba que respondiste al aviso de confianza y abre una sesión nueva (véase demos/01-instructions.txt). Mensaje de cierre: las instrucciones sirven para normas, no para procedimientos. Para procedimientos, el siguiente escalón.</a:t>
+              <a:t>Demo 1, dos minutos. La misma pregunta (con la misma frase final, «If the repo states no rules, say so.», que aquí no cambia nada porque el repo sí declara reglas) y el mismo modelo, con otra respuesta: ahora el agente lista las reglas del equipo, y lo que cuenta es lo que la demo 0 no podía adivinar: ids en PascalCase que terminan con el tipo de control (GreetButton), no cambiar nunca un AutomationId existente, texto visible en inglés y el comando de compilación, además de Name y AutomationId iguales. Las lee de .github/copilot-instructions.md al empezar la sesión. Si en la demo 0 salió algo sobre AutomationId, era una pista de la documentación del repo, no una norma. Antes tenía que adivinar y ahora lo sabe, y eso es lo que hay que subrayar. Segundo golpe, opcional: el botón Clear. El código puede salir igual que en la demo 0, pero ahora es una norma del repo y no depende de la suerte. Respaldo: demo1-rules.png. Si el agente dice que no recibió instrucciones, comprueba que respondiste al aviso de confianza y abre una sesión nueva (véase demos/01-instructions.txt). Mensaje de cierre: las instrucciones sirven para normas, no para procedimientos. Para procedimientos, el siguiente escalón.</a:t>
             </a:r>
             <a:endParaRPr lang="en-US" dirty="0"/>
           </a:p>
@@ -38361,7 +38361,7 @@
                 <a:ea typeface="IBM Plex Sans" pitchFamily="34" charset="-122"/>
                 <a:cs typeface="IBM Plex Sans" pitchFamily="34" charset="-120"/>
               </a:rPr>
-              <a:t>It lists our rules: Name and AutomationId, never change an ID, English text, the build command.</a:t>
+              <a:t>It lists our rules: PascalCase ids ending with the control type, never change an id, English text, the build command.</a:t>
             </a:r>
             <a:endParaRPr lang="en-US" sz="1500" dirty="0"/>
           </a:p>

--- a/github-copilot-app-extensibility.pptx
+++ b/github-copilot-app-extensibility.pptx
@@ -543,7 +543,7 @@
           <a:p>
             <a:r>
               <a:rPr lang="en-US" dirty="0"/>
-              <a:t>Bienvenida, 30 segundos. Presentación personal breve. Idea de la charla: la GitHub Copilot app se puede extender por nueve sitios distintos y vamos a recorrerlos todos, cada uno con una demo pequeña sobre el mismo repo. Los ejemplos usan una app Avalonia porque es lo que tengo a mano, pero nada de lo que veremos es específico de Avalonia: cambia el ejemplo por tu stack y todo aplica igual.</a:t>
+              <a:t>Welcome, 30 seconds. Quick personal introduction. The idea of the talk: the GitHub Copilot app can be extended in nine different places and we will go through all of them, each with a small demo on the same repo. The examples use an Avalonia app because it is what I have at hand, but nothing we will see is specific to Avalonia: swap the example for your stack and everything applies the same way.</a:t>
             </a:r>
             <a:endParaRPr lang="en-US" dirty="0"/>
           </a:p>
@@ -631,7 +631,7 @@
           <a:p>
             <a:r>
               <a:rPr lang="en-US" dirty="0"/>
-              <a:t>Pasos: 1. Abre una sesión nueva en el proyecto 02-skill. 2. Invoca la skill por su nombre. 3. Deja que proponga los nombres. No confirmes la edición todavía. Demo 2, dos minutos. La SampleApp tiene 15 controles interactivos y cinco elementos de menú sin AutomationId: es un hallazgo real del repo, no un ejemplo preparado. Fíjate en que el agente sigue los pasos en orden y pide confirmación, porque así lo dice la skill. No confirmes la edición: esos cinco huecos nos sirven también en la demo 4. En qué fijarse en la captura: El agente lee axaml.instructions.md y busca los .axaml: las instrucciones por ruta se aplican solas. Después pregunta con una tarjeta: la tabla trae los cinco MenuItem sin identificador, con su línea y un nombre propuesto, y marca como ya puestos NewItemMenu y NameBox. Pulsa Skip (Esc) o elige Leave files unchanged: no se edita nada. Respaldo de la demo 2: úsala si la demo en vivo falla o para quien descargue las slides. Es una ejecución real sobre el repo de la charla, con el prompt de la slide. El agente siguió el procedimiento de la skill: localizó las vistas, hizo inventario y presentó la tabla antes de editar nada.</a:t>
+              <a:t>Steps: 1. Open a new session in the 02-skill project. 2. Invoke the skill by name. 3. Let it propose the names. Do not confirm the edit yet. Demo 2, two minutes. SampleApp has 15 interactive controls and five menu items without an AutomationId: it is a real finding in the repo, not a prepared example. Notice that the agent follows the steps in order and asks for confirmation, because the skill says so. Do not confirm the edit: those five gaps are also useful in demo 4. What to look at in the screenshot: The agent reads axaml.instructions.md and looks for the .axaml files: path instructions apply on their own. Then it asks with a card: the table brings the five MenuItems without an identifier, with their line and a proposed name, and marks NewItemMenu and NameBox as already set. Press Skip (Esc) or choose Leave files unchanged: nothing is edited. Fallback for demo 2: use it if the live demo fails or for those who download the slides. It is a real run on the talk's repo, with the slide's prompt. The agent followed the skill's procedure: it located the views, made an inventory and presented the table before editing anything.</a:t>
             </a:r>
             <a:endParaRPr lang="en-US" dirty="0"/>
           </a:p>
@@ -719,7 +719,7 @@
           <a:p>
             <a:r>
               <a:rPr lang="en-US" dirty="0"/>
-              <a:t>Un minuto. Diferencia con una skill: la skill es un procedimiento que usa el agente que ya tienes. El agente personalizado es otro agente, con su prompt de sistema y sus herramientas, y trabaja en su propio contexto. La línea que hay que señalar es tools: ahí el límite lo pone la configuración, no la buena voluntad del modelo. El agente principal también puede delegarle trabajo como subagente.</a:t>
+              <a:t>One minute. Difference from a skill: a skill is a procedure used by the agent you already have. A custom agent is another agent, with its own system prompt and its own tools, and it works in its own context. The line to point at is tools: there the limit is set by the configuration, not by the goodwill of the model. The main agent can also delegate work to it as a subagent.</a:t>
             </a:r>
             <a:endParaRPr lang="en-US" dirty="0"/>
           </a:p>
@@ -807,7 +807,7 @@
           <a:p>
             <a:r>
               <a:rPr lang="en-US" dirty="0"/>
-              <a:t>Pasos: 1. Abre una sesión nueva en el proyecto 03-agent. 2. Manda un primer mensaje («Hi»): el selector de agente solo aparece con la sesión en marcha. Después escribe /agent avalonia-ui-tester y pulsa Enter (probado en la versión 1.1.30), o elígelo en el selector, a la derecha de Auto · Balance. 3. Pide el plan. Después pídele que arregle algo. Demo 3, dos minutos y medio. Guarda el plan que genera: es el que cargaremos en el canvas de la demo 8. Segundo prompt para enseñar el límite: «Añade el AutomationId que falta en el menú». Mensaje: hasta aquí el agente sabe más y se comporta mejor, pero sigue sin tener capacidades nuevas. Eso llega ahora. En qué fijarse en la captura: El agente se elige en el cuadro de mensaje: abajo se lee avalonia-ui-tester. Cada caso trae preparación, pasos y resultado esperado, y nombra los controles por su AutomationId. Solo ha usado lectura: no hay comandos ni ediciones. Respaldo de la demo 3. Ejecución real con el agente avalonia-ui-tester. Cubrió lo que pide su definición: camino feliz, entradas vacías y largas, tema claro y oscuro, y teclado sin ratón. Al final del plan, que en la captura sí se ve, añadió una sección de riesgos y bloqueos: los elementos de menú de tema claro y oscuro sin AutomationId y que el contenido principal no tiene un contenedor con scroll. También avisó de que no había ejecutado la app, tal como se le indica.</a:t>
+              <a:t>Steps: 1. Open a new session in the 03-agent project. 2. Send a first message (“Hi”): the agent selector only appears once the session is running. Then type /agent avalonia-ui-tester and press Enter (tested on version 1.1.30), or pick it in the selector, to the right of Auto · Balance. 3. Ask for the plan. Then ask it to fix something. Demo 3, two and a half minutes. Keep the plan it generates: it is the one we will load into the canvas in demo 8. Second prompt to show the limit: “Add the AutomationId that is missing on the menu”. Message: up to here the agent knows more and behaves better, but it still has no new capabilities. That comes now. What to look at in the screenshot: The agent is chosen in the message box: at the bottom you can read avalonia-ui-tester. Each case brings setup, steps and expected result, and names the controls by their AutomationId. It only used reading: no commands and no edits. Fallback for demo 3. Real run with the avalonia-ui-tester agent. It covered what its definition asks for: happy path, empty and long inputs, light and dark theme, and keyboard without a mouse. At the end of the plan, which is visible in the screenshot, it added a section of risks and blockers: the light and dark theme menu items without an AutomationId and the main content not having a scroll container. It also warned that it had not run the app, as it is told to.</a:t>
             </a:r>
             <a:endParaRPr lang="en-US" dirty="0"/>
           </a:p>
@@ -895,7 +895,7 @@
           <a:p>
             <a:r>
               <a:rPr lang="en-US" dirty="0"/>
-              <a:t>Cuarenta segundos. Puente desde el agente que acabamos de ver: un agente es un rol, y un rol puede tener su propio modelo. GitHub publicó en septiembre Project HydraFusion, una vista previa de investigación en Copilot CLI. Se activa con /experimental on y se elige en /model como HydraFusion (Research Preview). En cada turno decide entre tres patrones. Single: un modelo y listo. Cascade: un modelo eficiente hace el borrador y una puerta de calidad lo acepta o lo escala a uno más fuerte. Critique: un crítico de otra familia de modelos, que solo lee y no tiene herramientas, revisa el borrador y hay una única corrección. Los números son suyos, frente a Claude Opus 5 en solitario: mucho menos coste con una calidad parecida, y mejor en TerminalBench. Sus principios son buenos para cualquiera: contar todo el coste, que cada pierna esté acotada, revisión aislada, que un fallo no rompa nada y validar el enrutado. HydraFusion es una caja cerrada: no eliges los modelos. Pero las piezas para construir el mismo patrón ya están en la app, y eso es lo que vamos a hacer.</a:t>
+              <a:t>Forty seconds. Bridge from the agent we have just seen: an agent is a role, and a role can have its own model. In September GitHub published Project HydraFusion, a research preview in Copilot CLI. It is enabled with /experimental on and chosen in /model as HydraFusion (Research Preview). On each turn it decides between three patterns. Single: one model and that is it. Cascade: an efficient model drafts and a quality gate accepts it or escalates it to a stronger one. Critique: a critic from another model family, which only reads and has no tools, reviews the draft and there is a single correction. The numbers are theirs, against Claude Opus 5 alone: much lower cost with similar quality, and better on TerminalBench. Its principles are good for anyone: count the whole cost, keep each leg bounded, isolated review, a failure must not break anything, and validate the routing. HydraFusion is a closed box: you do not choose the models. But the pieces to build the same pattern are already in the app, and that is what we are going to do.</a:t>
             </a:r>
             <a:endParaRPr lang="en-US" dirty="0"/>
           </a:p>
@@ -983,7 +983,7 @@
           <a:p>
             <a:r>
               <a:rPr lang="en-US" dirty="0"/>
-              <a:t>Un minuto. Cuatro ficheros de agente y ninguna línea de código. Elegir el modelo de cada rol es un campo: model en el fichero del agente, como se ve arriba a la derecha. Si no lo pones, el agente usa el modelo de la sesión. Lo comprobé en la app: puse a un agente un modelo que mi cuenta no tiene y el subagente se negó a arrancar. Es una buena noticia: el modelo es configuración, no una sugerencia, y no cambia a otro por su cuenta. La CLI también acepta una lista de modelos en orden de preferencia, pero en la app que probé no pasó al segundo. El orchestrator es el único que elige la persona, con /agent, y tiene la herramienta agent, que le permite delegar en otros agentes personalizados. Cada subagente arranca con el modelo de su fichero: planifica un modelo con buen razonamiento, programa uno especializado en código y revisa uno de otra familia, que solo puede leer. Es el patrón Critique de HydraFusion hecho a mano. La regla de abajo está escrita en las instrucciones del orchestrator: como mucho una vuelta de corrección, que es lo que HydraFusion llama piernas acotadas. En Copilot CLI hay dos atajos que no tocan el repo: /model plan fija un modelo solo para el modo plan y vuelve al de la sesión al salir, y /subagents elige modelo, esfuerzo y ventana de contexto para cada subagente, incluido el rubber-duck integrado, que por defecto busca un modelo de otra familia. Ambos se guardan en tus ajustes como planModel y subagents.agents. Los modelos son los que tengo en mi cuenta; cámbialos por los que veas en /model.</a:t>
+              <a:t>One minute. Four agent files and not a single line of code. Choosing the model for each role is a field: model in the agent file, as you can see at the top right. If you leave it out, the agent uses the session's model. I checked it in the app: I gave an agent a model my account does not have and the subagent refused to start. That is good news: the model is configuration, not a suggestion, and it does not switch to another on its own. The CLI also accepts a list of models in order of preference, but in the app I tried it did not fall back to the second one. The orchestrator is the only one the person chooses, with /agent, and it has the agent tool, which lets it delegate to other custom agents. Each subagent starts with the model from its file: a model with good reasoning plans, one specialised in code writes, and one from another family reviews, and it can only read. It is HydraFusion's Critique pattern built by hand. The rule at the bottom is written in the orchestrator's instructions: at most one round of corrections, which is what HydraFusion calls bounded legs. In Copilot CLI there are two shortcuts that do not touch the repo: /model plan sets a model only for plan mode and goes back to the session's model on exit, and /subagents chooses the model, effort and context window for each subagent, including the built-in rubber-duck, which by default looks for a model from another family. Both are saved in your settings as planModel and subagents.agents. The models are the ones I have in my account; change them for the ones you see in /model.</a:t>
             </a:r>
             <a:endParaRPr lang="en-US" dirty="0"/>
           </a:p>
@@ -1071,7 +1071,7 @@
           <a:p>
             <a:r>
               <a:rPr lang="en-US" dirty="0"/>
-              <a:t>Pasos: 1. Abre una sesión nueva en el proyecto 03b-hierarchy. 2. Manda «Hi» y escribe /agent orchestrator (probado en la 1.1.30). 3. Mientras trabaja, señala cada subagente y el tiempo de cada fase. Demo 3b, tres minutos: la ejecución tarda unos dos minutos (en la versión 1.1.30 los subagentes informan de 11 segundos el planner, 24 el coder y 47 el reviewer), así que lánzala, explica la jerarquía mientras trabaja y vuelve al final. En la prueba anterior, planner 30 segundos, coder 53 y reviewer 35. El orchestrator no escribe código: solo reparte. Plan B: la captura de esta slide. Si un subagente no arranca, casi siempre es porque su modelo no está disponible en tu cuenta: cámbialo en su fichero por uno de los que veas en /model. En qué fijarse en la captura: Cada fase la hace un subagente distinto, con el modelo de su fichero. La tabla final trae los tres modelos configurados: claude-sonnet-5.5, gpt-5.3-codex y gemini-3.8-flash. En esta ejecución el reviewer aprobó a la primera, así que no hubo vuelta de corrección; si pide cambios, el coder tiene una sola oportunidad más. Respaldo de la demo 3b. Si repites la demo, restablece el repo después: el coder edita ficheros.</a:t>
+              <a:t>Steps: 1. Open a new session in the 03b-hierarchy project. 2. Send “Hi” and type /agent orchestrator (tested on 1.1.30). 3. While it works, point at each subagent and the time of each phase. Demo 3b, three minutes: the run takes about two minutes (on version 1.1.30 the subagents report 11 seconds for the planner, 24 for the coder and 47 for the reviewer), so launch it, explain the hierarchy while it works and come back at the end. In the earlier test: planner 30 seconds, coder 53 and reviewer 35. The orchestrator does not write code: it only hands out the work. Plan B: the screenshot on this slide. If a subagent does not start, it is almost always because its model is not available on your account: change it in its file to one of those you see in /model. What to look at in the screenshot: Each phase is done by a different subagent, with the model from its file. The final table brings the three configured models: claude-sonnet-5.5, gpt-5.3-codex and gemini-3.8-flash. In this run the reviewer approved on the first try, so there was no correction round; if it asks for changes, the coder has just one more chance. Fallback for demo 3b. If you repeat the demo, reset the repo afterwards: the coder edits files.</a:t>
             </a:r>
             <a:endParaRPr lang="en-US" dirty="0"/>
           </a:p>
@@ -1159,7 +1159,7 @@
           <a:p>
             <a:r>
               <a:rPr lang="en-US" dirty="0"/>
-              <a:t>Un minuto y medio. Hasta ahora hemos cambiado lo que el agente sabe. MCP cambia lo que puede hacer. Es un estándar abierto: el mismo servidor sirve en la app, en la CLI, en VS Code y en cualquier otro cliente MCP. Lo normal es usar servidores que ya existen (GitHub, Playwright, tu base de datos), y la app trae un catálogo en Customize. Escribimos uno propio solo para enseñar que no hay magia: el de la demo publica list_controls y find_missing_automation_ids en unas 240 líneas de Node sin dependencias. Abajo a la derecha está todo lo que hace falta para que el agente tenga una herramienta nueva: una descripción con su esquema y tres respuestas. initialize presenta al servidor, tools/list devuelve el catálogo y tools/call ejecuta. Los mensajes son JSON-RPC, uno por línea, por la entrada y la salida estándar. En un proyecto real usarías el SDK oficial de MCP, que añade validación y más tipos de contenido. La descripción de la herramienta es lo que lee el modelo para decidir cuándo llamarla: merece tanto cuidado como el código.</a:t>
+              <a:t>A minute and a half. So far we have changed what the agent knows. MCP changes what it can do. It is an open standard: the same server works in the app, in the CLI, in VS Code and in any other MCP client. The normal thing is to use servers that already exist (GitHub, Playwright, your database), and the app brings a catalog in Customize. We write our own just to show that there is no magic: the one in the demo publishes list_controls and find_missing_automation_ids in about 240 lines of Node with no dependencies. At the bottom right is everything needed for the agent to have a new tool: a description with its schema and three responses. initialize introduces the server, tools/list returns the catalog and tools/call runs it. The messages are JSON-RPC, one per line, over standard input and output. In a real project you would use the official MCP SDK, which adds validation and more content types. The tool's description is what the model reads to decide when to call it: it deserves as much care as the code.</a:t>
             </a:r>
             <a:endParaRPr lang="en-US" dirty="0"/>
           </a:p>
@@ -1247,7 +1247,7 @@
           <a:p>
             <a:r>
               <a:rPr lang="en-US" dirty="0"/>
-              <a:t>Pasos: 1. Usa el proyecto 04-mcp. 2. En una terminal, añade el servidor a tu configuración de usuario con la línea de 04-mcp.txt: copilot mcp add axaml-inspector -- node ~/copilot-talk/04-mcp/tools/axaml-inspector/server.mjs. 3. Abre una sesión nueva con el agente por defecto y lanza la pregunta. Demo 4, dos minutos. Importante: la app no carga el .mcp.json del repo ni el .github/mcp.json (probado en la versión 1.1.30). Sin el paso 2 el agente no encuentra la herramienta y, según la ejecución, lee el AXAML directamente o lanza el servidor por shell, que no es una llamada MCP. Con el servidor en la configuración de usuario (~/.copilot/mcp-config.json) la sesión nueva lo usa como herramienta nativa y la respuesta llega en una llamada. El botón Add server de Customize, MCP no se probó: haz el paso 2 con él una vez antes de la charla. Al terminar, restablece con copilot mcp remove axaml-inspector. Compara con la demo 2: la skill llegaba al mismo resultado buscando texto, aquí lo devuelve una herramienta. Las dos piezas se combinan: la skill ya dice «si existe find_missing_automation_ids, úsala». Plan B si el servidor no carga: ejecútalo en la terminal con el comando del guion y enseña el JSON de respuesta. En qué fijarse en la captura: El paso «Axaml Inspector · Find Missing Automation Ids» es una llamada nativa a la herramienta del servidor, no un comando de shell. Salen los cinco MenuItem con su línea, y los nombres traen la tecla de acceso tal como están en el AXAML (_File, E_xit). Respaldo de la demo 4. La pestaña MCP de Customize trae además un catálogo de servidores por categorías con un botón Add server en cada uno.</a:t>
+              <a:t>Steps: 1. Use the 04-mcp project. 2. In a terminal, add the server to your user configuration with the line from 04-mcp.txt: copilot mcp add axaml-inspector -- node ~/copilot-talk/04-mcp/tools/axaml-inspector/server.mjs. 3. Open a new session with the default agent and ask the question. Demo 4, two minutes. Important: the app does not load the repo's .mcp.json or .github/mcp.json (tested on version 1.1.30). Without step 2 the agent does not find the tool and, depending on the run, reads the AXAML directly or launches the server through the shell, which is not an MCP call. With the server in the user configuration (~/.copilot/mcp-config.json) the new session uses it as a native tool and the answer arrives in one call. The Add server button in Customize, MCP was not tested: do step 2 with it once before the talk. When you finish, reset with copilot mcp remove axaml-inspector. Compare with demo 2: the skill reached the same result by searching text, here a tool returns it. The two pieces combine: the skill already says “if find_missing_automation_ids exists, use it”. Plan B if the server does not load: run it in the terminal with the command from the script and show the JSON response. What to look at in the screenshot: The step “Axaml Inspector · Find Missing Automation Ids” is a native call to the server's tool, not a shell command. The five MenuItems come out with their line, and the names carry the access key as they are in the AXAML (_File, E_xit). Fallback for demo 4. Customize's MCP tab also brings a catalog of servers by category with an Add server button on each.</a:t>
             </a:r>
             <a:endParaRPr lang="en-US" dirty="0"/>
           </a:p>
@@ -1335,7 +1335,7 @@
           <a:p>
             <a:r>
               <a:rPr lang="en-US" dirty="0"/>
-              <a:t>Un minuto. Sin LSP el agente entiende el código buscando texto: funciona, pero confunde comentarios, documentación y nombres parecidos, y gasta contexto leyendo ficheros enteros. Con un servidor de lenguaje pregunta lo mismo que tu editor: ir a la definición, buscar referencias, renombrar un símbolo, ver tipos y documentación. Cada lenguaje tiene su servidor: aquí el de C# de Roslyn, que se lanza con dotnet dnx y necesita el SDK de .NET 10. La skill lsp-setup del catálogo Awesome GitHub Copilot lo configura sola para catorce lenguajes. Un plugin puede repartir la configuración con la clave lspServers. Aviso honesto: la documentación lo describe para Copilot CLI. Como cualquier servidor, instala solo los que vengan de fuentes de confianza.</a:t>
+              <a:t>One minute. Without LSP the agent understands code by searching text: it works, but it confuses comments, documentation and similar names, and it spends context reading whole files. With a language server it asks the same things your editor does: go to definition, find references, rename a symbol, see types and documentation. Each language has its own server: here the Roslyn one for C#, which is launched with dotnet dnx and needs the .NET 10 SDK. The lsp-setup skill from the Awesome GitHub Copilot catalog configures it for you for fourteen languages. A plugin can distribute the configuration with the lspServers key. Honest warning: the documentation describes it for Copilot CLI. As with any server, only install those that come from trusted sources.</a:t>
             </a:r>
             <a:endParaRPr lang="en-US" dirty="0"/>
           </a:p>
@@ -1423,7 +1423,7 @@
           <a:p>
             <a:r>
               <a:rPr lang="en-US" dirty="0"/>
-              <a:t>Demo 5, minuto y medio. La definición está en AppBuilderExtensions.cs del host y la única llamada real en Program.cs de SampleApp. La misma palabra aparece 13 veces en 7 ficheros si se busca como texto (git grep en 05-lsp): README, documentación y comentarios. Arranca el servidor una vez antes de la charla, porque la primera ejecución lo descarga. En las pruebas la app cargó la configuración LSP y respondió con la herramienta lsp. En frío la primera llamada puede fallar con un transport framing error: el agente reintenta y acierta. Plan B: haz esta demo en la CLI sobre el mismo repo, con el mismo fichero y el mismo resultado.</a:t>
+              <a:t>Demo 5, a minute and a half. The definition is in AppBuilderExtensions.cs of the host and the only real call in SampleApp's Program.cs. The same word appears 13 times in 7 files if you search it as text (git grep in 05-lsp): README, documentation and comments. Start the server once before the talk, because the first run downloads it. In testing the app loaded the LSP configuration and answered with the lsp tool. When cold, the first call can fail with a transport framing error: the agent retries and succeeds. Plan B: do this demo in the CLI on the same repo, with the same file and the same result.</a:t>
             </a:r>
             <a:endParaRPr lang="en-US" dirty="0"/>
           </a:p>
@@ -1511,7 +1511,7 @@
           <a:p>
             <a:r>
               <a:rPr lang="en-US" dirty="0"/>
-              <a:t>Medio minuto, sin detenerse. Quién soy: trabajo en Avalonia UI, en el framework y en productos como Avalonia MAUI, Avalonia Charts y el sistema de navegación. El ejemplo que recorre la charla, copilot-avalonia, es un proyecto mío: por eso las demos usan una app Avalonia, pero todo lo que veremos aplica igual a cualquier stack.</a:t>
+              <a:t>Half a minute, without stopping. Who I am: I work at Avalonia UI, on the framework and on products such as Avalonia MAUI, Avalonia Charts and the navigation system. The example that runs through the talk, copilot-avalonia, is a project of mine: that is why the demos use an Avalonia app, but everything we will see applies to any stack.</a:t>
             </a:r>
             <a:endParaRPr lang="en-US" dirty="0"/>
           </a:p>
@@ -1599,7 +1599,7 @@
           <a:p>
             <a:r>
               <a:rPr lang="en-US" dirty="0"/>
-              <a:t>Un minuto y medio. Es la única pieza declarativa que no pasa por el modelo: es código tuyo ejecutándose en el ciclo de vida. Eventos disponibles: sessionStart, sessionEnd, userPromptSubmitted, preToolUse, postToolUse, errorOccurred, agentStop y subagentStop, entre otros. Usos típicos: bloquear comandos peligrosos, proteger rutas, auditar, pasar un linter después de cada edición. Hay tres ámbitos: repo, usuario y política de empresa. Un hook no tiene API propia: es un programa que lee JSON por la entrada estándar y, si quiere bloquear, escribe JSON por la salida. Puede ser Node, bash, PowerShell o Python. Las reglas son una lista de denegación: el script separa el comando en sus partes y mira, por ejemplo, rm con -r y -f, git push con --force y las rutas que se van a escribir (.github/workflows y LICENSE). Abajo a la derecha está el núcleo del programa. Dos detalles de diseño: si la entrada no se puede leer, el script no bloquea la sesión, y cada decisión se anota en un registro de auditoría. Lo importante es que estas reglas se cumplen aunque el modelo decida ignorar las instrucciones, pero solo cubren lo que la lista conoce: es una red de seguridad, no un sandbox.</a:t>
+              <a:t>A minute and a half. It is the only declarative piece that does not go through the model: it is your own code running in the lifecycle. Available events: sessionStart, sessionEnd, userPromptSubmitted, preToolUse, postToolUse, errorOccurred, agentStop and subagentStop, among others. Typical uses: blocking dangerous commands, protecting paths, auditing, running a linter after each edit. There are three scopes: repo, user and company policy. A hook has no API of its own: it is a program that reads JSON on standard input and, if it wants to block, writes JSON on output. It can be Node, bash, PowerShell or Python. The rules are a deny-list: the script splits the command into its parts and looks at, for example, rm with -r and -f, git push with --force and the paths that are about to be written (.github/workflows and LICENSE). At the bottom right is the core of the program. Two design details: if the input cannot be read, the script does not block the session, and every decision is written to an audit log. The important thing is that these rules are enforced even if the model decides to ignore the instructions, but they only cover what the list knows: it is a safety net, not a sandbox.</a:t>
             </a:r>
             <a:endParaRPr lang="en-US" dirty="0"/>
           </a:p>
@@ -1687,7 +1687,7 @@
           <a:p>
             <a:r>
               <a:rPr lang="en-US" dirty="0"/>
-              <a:t>Pasos: 1. Abre una sesión nueva en el proyecto 06-hooks. 2. Pide algo destructivo sobre una carpeta de prueba. 3. Enseña el registro de auditoría que deja el hook. Demo 6, dos minutos. Comprobada en la app: el hook bloquea el comando. El prompt crea primero una carpeta de prueba porque docs/_site no existe en un clon limpio y, si el hook fallara, solo se borraría esa carpeta. Plan B en terminal: pasa por stdin un JSON con toolName bash y el comando rm -rf a guard.mjs y enseña la respuesta deny. El hook también protege .github/workflows contra escrituras: puedes enseñarlo si sobra tiempo. En qué fijarse en la captura: El agente prepara un único comando de shell que crea la carpeta y la borra. El hook lo deniega antes de ejecutarse: ni se crea ni se borra nada. El agente lo cuenta tal cual: el comando fue bloqueado por un guardia de seguridad y tmp-demo no se creó ni se borró. En la versión 1.1.30 el agente, tras ver la denegación («Denied by preToolUse hook: Forced recursive delete (rm -rf)»), creó el fichero, lo borró con rm y quitó la carpeta vacía con rmdir: el hook frena el comando, no el objetivo. Es el mejor argumento para la slide 20: una red de seguridad, no un sandbox. Cualquiera de los dos resultados vale, y en los dos el registro de auditoría anota DENY (captura alternativa: demo6-hook-workaround.png). Respaldo de la demo 6. Ejecución real: el hook de .github/hooks funcionó en la app. Un detalle de las pruebas: la primera petición, borrar docs/_site, no llegó a probar el hook porque esa carpeta no existe en un clon limpio y el agente lo comprobó antes de ejecutar nada. Por eso el prompt de la demo crea primero una carpeta de prueba. Es además un prompt seguro: si el hook fallara, solo se borraría esa carpeta temporal.</a:t>
+              <a:t>Steps: 1. Open a new session in the 06-hooks project. 2. Ask for something destructive on a test folder. 3. Show the audit log the hook leaves. Demo 6, two minutes. Checked in the app: the hook blocks the command. The prompt first creates a test folder because docs/_site does not exist in a clean clone and, if the hook failed, only that folder would be deleted. Plan B in the terminal: pass a JSON with toolName bash and the rm -rf command to guard.mjs on stdin and show the deny response. The hook also protects .github/workflows against writes: you can show it if time is left. What to look at in the screenshot: The agent prepares a single shell command that creates the folder and deletes it. The hook denies it before it runs: nothing is created or deleted. The agent tells it as it is: the command was blocked by a safety guard and tmp-demo was neither created nor deleted. On version 1.1.30, after seeing the denial (“Denied by preToolUse hook: Forced recursive delete (rm -rf)”), the agent created the file, deleted it with rm and removed the empty folder with rmdir: the hook stops the command, not the goal. It is the best argument for slide 20: a safety net, not a sandbox. Either result is fine, and in both the audit log records DENY (alternative screenshot: demo6-hook-workaround.png). Fallback for demo 6. Real run: the hook in .github/hooks worked in the app. A detail from testing: the first request, deleting docs/_site, never tested the hook because that folder does not exist in a clean clone and the agent checked before running anything. That is why the demo prompt creates a test folder first. It is also a safe prompt: if the hook failed, only that temporary folder would be deleted.</a:t>
             </a:r>
             <a:endParaRPr lang="en-US" dirty="0"/>
           </a:p>
@@ -1775,7 +1775,7 @@
           <a:p>
             <a:r>
               <a:rPr lang="en-US" dirty="0"/>
-              <a:t>Quince segundos de respiro. Resume: con seis ficheros de texto el agente conoce nuestras normas, tiene un procedimiento, un rol, una herramienta nueva, comprensión precisa del código y un límite. Todo eso se revisa en un pull request. Lo que viene ahora ejecuta código nuestro dentro de la sesión, y todavía es experimental: la API puede cambiar.</a:t>
+              <a:t>Fifteen seconds to breathe. Summary: with six text files the agent knows our rules, has a procedure, a role, a new tool, precise understanding of the code and a limit. All of that is reviewed in a pull request. What comes now runs our own code inside the session, and it is still experimental: the API can change.</a:t>
             </a:r>
             <a:endParaRPr lang="en-US" dirty="0"/>
           </a:p>
@@ -1863,7 +1863,7 @@
           <a:p>
             <a:r>
               <a:rPr lang="en-US" dirty="0"/>
-              <a:t>Un minuto y medio. Diferencia con MCP: un servidor MCP solo publica herramientas y no sabe nada de la sesión. Una extensión vive dentro de ella: ve los eventos, puede interceptar herramientas, inyectar contexto y enviar mensajes al agente. El código hace tres cosas que un hook de fichero o un servidor MCP no pueden hacer juntas. Registra una herramienta propia. Añade un hook en proceso: mira el prompt antes de que lo vea el agente y, si habla de interfaces, le sugiere usar nuestra herramienta; nadie tiene que acordarse de pedirlo. Y escucha eventos: cuenta las herramientas ejecutadas y escribe un resumen en la sesión al terminar el turno. La variable toolCalls vive entre llamadas porque la extensión es un proceso que dura lo que dura la sesión. Reglas que conviene decir en voz alta: solo ficheros .mjs, el nombre de cada herramienta tiene que ser único entre todas las extensiones cargadas, y nada de console.log. No llames a session.send dentro de onUserPromptSubmitted o crearás un bucle. Proyecto en .github/extensions, personal en ~/.copilot/extensions.</a:t>
+              <a:t>A minute and a half. Difference from MCP: an MCP server only publishes tools and knows nothing about the session. An extension lives inside it: it sees the events, can intercept tools, inject context and send messages to the agent. The code does three things that a file hook or an MCP server cannot do together. It registers a tool of its own. It adds an in-process hook: it looks at the prompt before the agent sees it and, if it talks about interfaces, suggests using our tool; nobody has to remember to ask for it. And it listens to events: it counts the tools run and writes a summary in the session when the turn ends. The variable toolCalls lives between calls because the extension is a process that lasts as long as the session. Rules worth saying out loud: only .mjs files, each tool name must be unique among all loaded extensions, and no console.log. Do not call session.send inside onUserPromptSubmitted or you will create a loop. Project in .github/extensions, personal in ~/.copilot/extensions.</a:t>
             </a:r>
             <a:endParaRPr lang="en-US" dirty="0"/>
           </a:p>
@@ -1951,7 +1951,7 @@
           <a:p>
             <a:r>
               <a:rPr lang="en-US" dirty="0"/>
-              <a:t>Un minuto. No lo leas entero: es el mapa de lo que cabe en una extensión. Señala tres filas. Hooks: los mismos puntos que los hooks de fichero, pero en proceso y con memoria. requestedEnvironmentVariables: Copilot quita las variables sensibles del entorno de las extensiones y hay que pedirlas por su nombre, con aprobación explícita. Workflows: orquestación de subagentes, todavía experimental. Las extensiones son la navaja suiza: casi todo lo anterior se puede hacer también desde aquí.</a:t>
+              <a:t>One minute. Do not read it all: it is the map of what fits in an extension. Point at three rows. Hooks: the same points as file hooks, but in process and with memory. requestedEnvironmentVariables: Copilot removes sensitive variables from the extensions' environment and they must be requested by name, with explicit approval. Workflows: orchestration of subagents, still experimental. Extensions are the Swiss army knife: almost everything before can also be done from here.</a:t>
             </a:r>
             <a:endParaRPr lang="en-US" dirty="0"/>
           </a:p>
@@ -2039,7 +2039,7 @@
           <a:p>
             <a:r>
               <a:rPr lang="en-US" dirty="0"/>
-              <a:t>Pasos: 1. Usa el proyecto 07-extension. El código ya se ha visto: no hace falta abrir el fichero. 2. Sesión nueva: aparece «avalonia-tools loaded». 3. Lanza la pregunta. Demo 7, minuto y medio. La extensión tiene poco más de cien líneas. Enseña que nadie le dijo al agente que usara la herramienta: el hook onUserPromptSubmitted inyectó la sugerencia al detectar la palabra canvas. Variante si sobra tiempo: comenta UseCopilotAvalonia() en Program.cs y repite; la herramienta devuelve el problema concreto. Tras cambiar una extensión hay que empezar una sesión nueva. En qué fijarse en la captura: La llamada aparece con su nombre: avalonia_project_info. La respuesta sale del resultado de la herramienta: Avalonia 11.3, net8.0, sin problemas. Una sola llamada. Sin la herramienta habría leído tres ficheros para deducirlo. Respaldo de la demo 7. Ejecución real: la extensión avalonia-tools de .github/extensions se cargó sola al abrir el proyecto y su herramienta avalonia_project_info estuvo disponible sin instalar nada. La herramienta lee el csproj, Program.cs y el perfil de arranque y devuelve un resumen. En la captura de la demo 8 se ve además el efecto del hook de la extensión: el agente llama a esta herramienta antes de abrir un canvas sin que nadie se lo pida.</a:t>
+              <a:t>Steps: 1. Use the 07-extension project. The code has already been seen: there is no need to open the file. 2. New session: “avalonia-tools loaded” appears. 3. Ask the question. Demo 7, a minute and a half. The extension is a little over a hundred lines. Show that nobody told the agent to use the tool: the onUserPromptSubmitted hook injected the suggestion when it detected the word canvas. Variant if time is left: comment out UseCopilotAvalonia() in Program.cs and repeat; the tool returns the specific problem. After changing an extension you have to start a new session. What to look at in the screenshot: The call appears by name: avalonia_project_info. The answer comes from the tool's result: Avalonia 11.3, net8.0, no problems. A single call. Without the tool it would have read three files to work it out. Fallback for demo 7. Real run: the avalonia-tools extension in .github/extensions loaded by itself when the project was opened and its avalonia_project_info tool was available without installing anything. The tool reads the csproj, Program.cs and the launch profile and returns a summary. In the demo 8 screenshot you can also see the effect of the extension's hook: the agent calls this tool before opening a canvas without anybody asking it to.</a:t>
             </a:r>
             <a:endParaRPr lang="en-US" dirty="0"/>
           </a:p>
@@ -2127,7 +2127,7 @@
           <a:p>
             <a:r>
               <a:rPr lang="en-US" dirty="0"/>
-              <a:t>Un minuto. Volvemos a la jerarquía del paso 3, pero ahora el orden no lo decide un modelo leyendo instrucciones: lo decide el código. Es un Dynamic Workflow, en vista previa desde el 1 de octubre en Copilot CLI y en la app, y vive dentro de una extensión: se registra con joinSession, workflows y defineWorkflow. ctx.agent lanza un subagente y acepta agent, para usar uno de nuestros ficheros de agente con su modelo, y model, para forzar otro. A la izquierda, las tres fases. El reviewer responde con un schema, así el código sabe si aprobó sin interpretar texto. A la derecha está el patrón Cascade de HydraFusion: solo si el reviewer rechaza, el mismo agente repite con un modelo de una generación más reciente y de la misma familia, para que el reviewer siga siendo de otra. Y los límites van declarados: como mucho siete subagentes en el peor caso. El runtime guarda cada paso, así que una ejecución que se para por un límite se puede reanudar.</a:t>
+              <a:t>One minute. We go back to the hierarchy of step 3, but now the order is not decided by a model reading instructions: the code decides it. It is a Dynamic Workflow, in preview since October 1 in Copilot CLI and in the app, and it lives inside an extension: it is registered with joinSession, workflows and defineWorkflow. ctx.agent launches a subagent and accepts agent, to use one of our agent files with its model, and model, to force another one. On the left, the three phases. The reviewer answers with a schema, so the code knows whether it approved without interpreting text. On the right is HydraFusion's Cascade pattern: only if the reviewer rejects, the same agent repeats the work with a model from a newer generation and the same family, so the reviewer is still from another one. And the limits are declared: at most seven subagents in the worst case. The runtime saves each step, so a run that stops at a limit can be resumed.</a:t>
             </a:r>
             <a:endParaRPr lang="en-US" dirty="0"/>
           </a:p>
@@ -2215,7 +2215,7 @@
           <a:p>
             <a:r>
               <a:rPr lang="en-US" dirty="0"/>
-              <a:t>Pasos: 1. Abre una sesión nueva en el proyecto 07b-workflow con el agente por defecto. 2. Pide el workflow. Si la app pide permiso, apruébalo. 3. Abre Dynamic workflows, encima del prompt, y entra en la ejecución. Demo 7b, tres minutos. En un ensayo la ejecución del workflow tardó 44 segundos; en las pruebas completas el panel marcó Completed 2m (versión 1.1.29) y pasaron 104 segundos hasta el resumen final (versión 1.1.30: planner 10 segundos, coder 23, reviewer 56). El chat parece inactivo a los 15 segundos mientras el workflow sigue en segundo plano: espera al resumen. Lánzala y explica los paneles mientras corre; si vas justo, enseña la captura. Abre el panel de la ejecución mientras corre: fase actual, agentes iniciados y activos y créditos de IA. Desde ahí se puede pausar y reanudar. Fuera de la app, el mismo workflow se lanza con copilot workflow run plan-code-review y los argumentos en JSON, que es como lo meterías en un pipeline. Plan B: la captura de esta slide. En qué fijarse en la captura: Arriba, el resumen: el workflow plan-code-review terminó y el reviewer aprobó sin problemas, así que nunca escaló a un modelo más capaz. Abajo, el panel Dynamic workflows con la ejecución en Recently finished: Completed, 2m. Respaldo de la demo 7b. La misma tarea que en la demo 3b, el botón Reset, con los mismos tres agentes, pero aquí el orden lo fija el código y la revisión devuelve un JSON con forma fija. En un ensayo anterior el panel de la ejecución mostraba el detalle: 11, 20 y 13 segundos por fase, Escalar omitida, 8,01 créditos y 3 de los 7 agentes permitidos por meta.limits (44 segundos en total). Esa vista por fases no está en esta captura. El resultado también avisa de que node --test tests/*.mjs falla porque en el paso 7b no está la extensión copilot-avalonia: es un problema previo y ajeno al cambio. No es una comparación justa de modelos; es una muestra de lo que cambia cuando el flujo lo controla el código.</a:t>
+              <a:t>Steps: 1. Open a new session in the 07b-workflow project with the default agent. 2. Ask for the workflow. If the app asks for permission, approve it. 3. Open Dynamic workflows, above the prompt, and enter the run. Demo 7b, three minutes. In one rehearsal the workflow run took 44 seconds; in the full tests the panel showed Completed 2m (version 1.1.29) and 104 seconds passed until the final summary (version 1.1.30: planner 10 seconds, coder 23, reviewer 56). The chat looks idle after 15 seconds while the workflow carries on in the background: wait for the summary. Launch it and explain the panels while it runs; if you are short of time, show the screenshot. Open the run's panel while it runs: current phase, agents started and active, and AI credits. From there it can be paused and resumed. Outside the app, the same workflow is launched with copilot workflow run plan-code-review and the arguments in JSON, which is how you would put it in a pipeline. Plan B: the screenshot on this slide. What to look at in the screenshot: At the top, the summary: the plan-code-review workflow finished and the reviewer approved without problems, so it never escalated to a more capable model. At the bottom, the Dynamic workflows panel with the run under Recently finished: Completed, 2m. Fallback for demo 7b. The same task as in demo 3b, the Reset button, with the same three agents, but here the order is set by the code and the review returns a JSON with a fixed shape. In an earlier rehearsal the run's panel showed the detail: 11, 20 and 13 seconds per phase, Escalate skipped, 8.01 credits and 3 of the 7 agents allowed by meta.limits (44 seconds in total). That per-phase view is not in this screenshot. The result also warns that node --test tests/*.mjs fails because in step 7b the copilot-avalonia extension is not there: it is a previous problem unrelated to the change. It is not a fair comparison of models; it is a sample of what changes when the flow is controlled by code.</a:t>
             </a:r>
             <a:endParaRPr lang="en-US" dirty="0"/>
           </a:p>
@@ -2303,7 +2303,7 @@
           <a:p>
             <a:r>
               <a:rPr lang="en-US" dirty="0"/>
-              <a:t>Un minuto. Un canvas no es un generador de interfaces: es una superficie de trabajo donde el estado es visible y lo pueden cambiar los dos. Ejemplos: un tablero de triaje, un plan, una lista de comprobación de una release, una sesión de navegador. Técnicamente es una extensión que declara canvases. La forma rápida de empezar es /create-canvas: describes el flujo y las acciones, y el agente escribe la extensión. Lo vamos a hacer a mano para ver qué hay debajo. El SDK de canvas es experimental.</a:t>
+              <a:t>One minute. A canvas is not an interface generator: it is a work surface where the state is visible and both can change it. Examples: a triage board, a plan, a release checklist, a browser session. Technically it is an extension that declares canvases. The quick way to start is /create-canvas: you describe the flow and the actions, and the agent writes the extension. We are going to do it by hand to see what is underneath. The canvas SDK is experimental.</a:t>
             </a:r>
             <a:endParaRPr lang="en-US" dirty="0"/>
           </a:p>
@@ -2391,7 +2391,7 @@
           <a:p>
             <a:r>
               <a:rPr lang="en-US" dirty="0"/>
-              <a:t>Un minuto y medio. A la izquierda, el contrato: open arranca la interfaz y devuelve su URL, y puede repetirse con el mismo instanceId, así que tiene que ser idempotente. actions son los verbos del agente: nómbralos como verbos. onClose limpia: cierra el servidor y libera lo que abriste. Tres identificadores que conviene no mezclar: canvasId es el tipo de canvas que declara la extensión, instanceId es el panel concreto que alguien abrió, y extensionId lo deriva Copilot del origen y el nombre. La descripción del canvas y la de cada acción son lo que lee el agente para decidir cuándo usarlo: son parte del diseño. Detrás del panel no hay ningún framework especial: un servidor HTTP de Node que sirve una página. Tres decisiones de seguridad: escuchar solo en 127.0.0.1, un puerto elegido por el sistema y un token aleatorio en la ruta, de modo que sin la URL completa todo responde 404. A la derecha, la dirección que hace especial a un canvas: la página no ejecuta las pruebas, hace un POST y la extensión llama a session.send. La interfaz se convierte en una forma de dirigir al agente. Reglas: los nombres de acción no pueden empezar por «canvas.» y los errores se lanzan con CanvasError y un código. El estado vive en memoria: si necesitas que sobreviva a la sesión, guárdalo en el directorio de trabajo de la sesión.</a:t>
+              <a:t>A minute and a half. On the left, the contract: open starts the interface and returns its URL, and it can be repeated with the same instanceId, so it has to be idempotent. actions are the agent's verbs: name them as verbs. onClose cleans up: it closes the server and frees whatever you opened. Three identifiers worth keeping apart: canvasId is the type of canvas the extension declares, instanceId is the specific panel somebody opened, and extensionId is derived by Copilot from the origin and the name. The description of the canvas and that of each action are what the agent reads to decide when to use it: they are part of the design. Behind the panel there is no special framework: a Node HTTP server that serves a page. Three security decisions: listen only on 127.0.0.1, a port chosen by the system and a random token in the path, so that without the full URL everything answers 404. On the right, the direction that makes a canvas special: the page does not run the tests, it makes a POST and the extension calls session.send. The interface becomes a way of steering the agent. Rules: action names cannot start with “canvas.” and errors are thrown with CanvasError and a code. The state lives in memory: if you need it to survive the session, keep it in the session's working directory.</a:t>
             </a:r>
             <a:endParaRPr lang="en-US" dirty="0"/>
           </a:p>
@@ -2479,7 +2479,7 @@
           <a:p>
             <a:r>
               <a:rPr lang="en-US" dirty="0"/>
-              <a:t>Un minuto. El agente que trae la app es bueno, pero es el mismo para todo el mundo. Extender es cerrar tres huecos: lo que sabe de tu proyecto, lo que puede hacer fuera del repo y cómo lo controlas y trabajas con él. Debajo de cada tarjeta están las piezas que cubren ese hueco. Esta clasificación vuelve al final, en la tabla de qué usar en cada caso.</a:t>
+              <a:t>One minute. The agent that ships with the app is good, but it is the same for everybody. Extending it means closing three gaps: what it knows about your project, what it can do outside the repo, and how you control it and work alongside it. Under each card are the pieces that cover that gap. This classification comes back at the end, in the table of what to use in each case.</a:t>
             </a:r>
             <a:endParaRPr lang="en-US" dirty="0"/>
           </a:p>
@@ -2567,7 +2567,7 @@
           <a:p>
             <a:r>
               <a:rPr lang="en-US" dirty="0"/>
-              <a:t>Pasos: 1. Abre una sesión nueva en el proyecto 08-canvas. 2. Pide el canvas con tres casos. 3. Añade tú un caso y marca otro a mano. 4. Pregunta «¿Cómo va el plan?». Demo 8, dos minutos. Las dos direcciones son lo importante. Del agente al canvas: add_case y set_status. De la persona al agente: tus clics cambian el estado que él lee. Hay una tercera: el botón «Ask Copilot to run it» llama a session.send desde la extensión, de modo que la interfaz dispara trabajo del agente. No lo pulses todavía: lo usamos en la demo siguiente. En qué fijarse en la captura: Tres llamadas: avalonia_project_info, list_canvas_capabilities y open_canvas. Los tres casos los creó el agente a partir del prompt y aparecen como Pending: el contador de arriba dice 3 cases, 0 passed, 0 failed, 3 pending. Todavía no se ha tocado nada a mano: cambia un estado y añade un caso en directo. Abajo, el botón azul Ask Copilot to run it. Respaldo de la demo 8. Ejecución real del canvas ui-test-plan. La primera llamada, avalonia_project_info, no estaba en el prompt: la provocó el hook de la extensión del paso anterior al ver la palabra canvas. Es un buen ejemplo de piezas que se combinan. En directo no aparece: la carpeta 08-canvas solo tiene el canvas. El contador de arriba se actualiza solo cuando cambias o añades casos.</a:t>
+              <a:t>Steps: 1. Open a new session in the 08-canvas project. 2. Ask for the canvas with three cases. 3. Add a case yourself and mark another by hand. 4. Ask “How is the plan going?”. Demo 8, two minutes. The two directions are what matters. From the agent to the canvas: add_case and set_status. From the person to the agent: your clicks change the state it reads. There is a third: the “Ask Copilot to run it” button calls session.send from the extension, so the interface triggers work by the agent. Do not press it yet: we use it in the next demo. What to look at in the screenshot: Three calls: avalonia_project_info, list_canvas_capabilities and open_canvas. The three cases were created by the agent from the prompt and appear as Pending: the counter at the top says 3 cases, 0 passed, 0 failed, 3 pending. Nothing has been touched by hand yet: change a status and add a case live. At the bottom, the blue Ask Copilot to run it button. Fallback for demo 8. Real run of the ui-test-plan canvas. The first call, avalonia_project_info, was not in the prompt: it was triggered by the previous step's extension hook on seeing the word canvas. It is a good example of pieces that combine. It does not appear live: the 08-canvas folder only has the canvas. The counter at the top updates by itself when you change or add cases.</a:t>
             </a:r>
             <a:endParaRPr lang="en-US" dirty="0"/>
           </a:p>
@@ -2655,7 +2655,7 @@
           <a:p>
             <a:r>
               <a:rPr lang="en-US" dirty="0"/>
-              <a:t>Un minuto y medio. Es un ejemplo, no el tema de la charla: sirve para ver hasta dónde llega un canvas cuando lo que hay detrás no es una lista sino un proceso externo complejo. En la captura se ve lo mismo que en la demo anterior: a la izquierda las llamadas «Invoke canvas action», a la derecha el panel con la interfaz. Es código abierto y cabe en un extension.mjs de 600 líneas más un host .NET. A la derecha de la slide, la arquitectura: la extensión no contiene la lógica, es un adaptador fino. Todo lo difícil vive en un proceso aparte con su propia API, y eso es una buena decisión de diseño por dos motivos. Primero, el SDK de canvas es experimental: si cambia, solo se reescribe el adaptador. Segundo, la misma API sirve para scripts y pruebas sin Copilot. El recorrido de una sola acción de punta a punta son cuatro saltos: el agente pide fill_control sobre NameBox, la extensión hace un POST a /api/input/fill_control, el host escribe en el TextBox real y vuelve filled.valueMatches: true, un resultado que se puede verificar. Cambia la app Avalonia por un emulador, un navegador, un dispositivo o un cuadro de mando y el patrón es idéntico.</a:t>
+              <a:t>A minute and a half. It is an example, not the subject of the talk: it shows how far a canvas can go when what is behind it is not a list but a complex external process. In the screenshot you see the same as in the previous demo: on the left the “Invoke canvas action” calls, on the right the panel with the interface. It is open source and fits in a 600-line extension.mjs plus a .NET host. On the right of the slide, the architecture: the extension does not contain the logic, it is a thin adapter. Everything hard lives in a separate process with its own API, and that is a good design decision for two reasons. First, the canvas SDK is experimental: if it changes, only the adapter has to be rewritten. Second, the same API serves scripts and tests without Copilot. The path of a single action from end to end is four hops: the agent asks for fill_control on NameBox, the extension makes a POST to /api/input/fill_control, the host writes into the real TextBox and filled.valueMatches: true comes back, a result that can be verified. Swap the Avalonia app for an emulator, a browser, a device or a dashboard and the pattern is identical.</a:t>
             </a:r>
             <a:endParaRPr lang="en-US" dirty="0"/>
           </a:p>
@@ -2743,7 +2743,7 @@
           <a:p>
             <a:r>
               <a:rPr lang="en-US" dirty="0"/>
-              <a:t>Cuarenta segundos. Las mismas dos funciones que el canvas mínimo, en versión de producción. A la izquierda, open: en lugar de arrancar un servidor propio, lanza la app con una variable de entorno y espera a que imprima su URL. Antes de aceptarla comprueba que apunta a loopback. A la derecha, un patrón que merece copiarse: una función que fabrica acciones. Todas las acciones que modifican algo pasan por leasedAction, que exige tener el control y las encola para que se ejecuten en orden. Así la regla de seguridad está en un solo sitio y no depende de que cada acción se acuerde de comprobarla. Fíjate en que la descripción también lo dice: el agente lo lee antes de equivocarse.</a:t>
+              <a:t>Forty seconds. The same two functions as the minimal canvas, in production form. On the left, open: instead of starting a server of its own, it launches the app with an environment variable and waits for it to print its URL. Before accepting it, it checks that it points to loopback. On the right, a pattern worth copying: a function that builds actions. Every action that modifies something goes through leasedAction, which requires having control and queues them so they run in order. That way the safety rule lives in a single place and does not depend on each action remembering to check it. Notice that the description says it too: the agent reads it before getting it wrong.</a:t>
             </a:r>
             <a:endParaRPr lang="en-US" dirty="0"/>
           </a:p>
@@ -2831,7 +2831,7 @@
           <a:p>
             <a:r>
               <a:rPr lang="en-US" dirty="0"/>
-              <a:t>Pasos: 1. Sesión nueva en el proyecto 09-real-canvas, con el agente por defecto. Abre el plan con el prompt de la demo 8 y lanza el prompt. 2. Señala el aviso del lease y pulsa Take back control. 3. En el plan de pruebas, pulsa «Ask Copilot to run it» (probado en la versión 1.1.30: el agente tarda unos 46 segundos y marca los tres casos como Passed). Demo 9, tres minutos: en la versión 1.1.30 el primer prompt tardó 34 segundos (en la 1.1.29, un minuto y medio) y la ejecución del plan 46. Es la única demo con dos canvas a la vez: el plan de pruebas de la demo 8 y la app. El tercer paso los une: la interfaz del plan le pide al agente que ejecute los casos contra la app y él va marcando cada uno. Ten la app compilada de antemano para que el arranque sea rápido. Plan B: arranca la app en modo canvas desde la terminal y abre en el navegador la URL que imprime. Plan C: los GIF de la carpeta images del repo. En qué fijarse en la captura: El aviso morado: Agent has control, con su motivo y el botón Take back control. La app aparece en el panel con el saludo ya pintado. En el chat, el agente preguntó el nombre con una tarjeta, porque el prompt dice «my name» y no lo sabe: respóndela. Si quieres evitar la pregunta, escribe el nombre en el prompt («enter the name Javier»). Respaldo de la demo 9. El agente abre el canvas, pregunta el nombre, rellena NameBox, pulsa GreetButton y lee el saludo desde GreetingText: Hello, Javier Suárez!. La pestaña del plan de pruebas sigue abierta al lado: son dos canvas en la misma sesión.</a:t>
+              <a:t>Steps: 1. New session in the 09-real-canvas project, with the default agent. Open the plan with the demo 8 prompt and then launch the prompt. 2. Point at the lease banner and press Take back control. 3. In the test plan, press “Ask Copilot to run it” (tested on version 1.1.30: the agent takes about 46 seconds and marks the three cases as Passed). Demo 9, three minutes: on version 1.1.30 the first prompt took 34 seconds (on 1.1.29, a minute and a half) and running the plan 46. It is the only demo with two canvases at once: the demo 8 test plan and the app. The third step joins them: the plan's interface asks the agent to run the cases against the app and it marks each one. Have the app built beforehand so that it starts fast. Plan B: start the app in canvas mode from the terminal and open the URL it prints in the browser. Plan C: the GIFs in the repo's images folder. What to look at in the screenshot: The purple banner: Agent has control, with its reason and the Take back control button. The app appears in the panel with the greeting already painted. In the chat, the agent asked for the name with a card, because the prompt says “my name” and it does not know it: answer it. If you want to avoid the question, put the name in the prompt (“enter the name Javier”). Fallback for demo 9. The agent opens the canvas, asks for the name, fills NameBox, presses GreetButton and reads the greeting from GreetingText: Hello, Javier Suárez!. The test plan tab stays open next to it: they are two canvases in the same session.</a:t>
             </a:r>
             <a:endParaRPr lang="en-US" dirty="0"/>
           </a:p>
@@ -2919,7 +2919,7 @@
           <a:p>
             <a:r>
               <a:rPr lang="en-US" dirty="0"/>
-              <a:t>Respaldo del final de la demo 9, y la captura que mejor resume el bloque. El tercer mensaje de la sesión, «Run the test plan in canvas…», no lo escribió nadie: lo envió la extensión con session.send cuando se pulsó el botón azul «Ask Copilot to run it» (probado en la versión 1.1.30: el agente tardó 46 segundos). El agente leyó el plan con get_plan, usó el otro canvas para pulsar el contador, cambiar el tema a oscuro y hacer una captura, y anotó el resultado de cada caso con set_status. Las notas son evidencia concreta: el texto pasó de Clicked 0 times a Clicked 1 time y la captura mostró fondos oscuros con texto claro. Dos canvas de dos extensiones distintas colaborando sin conocerse.</a:t>
+              <a:t>Fallback for the end of demo 9, and the screenshot that best sums up the block. The third message of the session, “Run the test plan in canvas…”, was not typed by anybody: it was sent by the extension with session.send when the blue “Ask Copilot to run it” button was pressed (tested on version 1.1.30: the agent took 46 seconds). The agent read the plan with get_plan, used the other canvas to press the counter, switch the theme to dark and take a screenshot, and recorded the result of each case with set_status. The notes are concrete evidence: the text went from Clicked 0 times to Clicked 1 time and the screenshot showed dark backgrounds with light text. Two canvases from two different extensions collaborating without knowing each other.</a:t>
             </a:r>
             <a:endParaRPr lang="en-US" dirty="0"/>
           </a:p>
@@ -3007,7 +3007,7 @@
           <a:p>
             <a:r>
               <a:rPr lang="en-US" dirty="0"/>
-              <a:t>Treinta segundos. Son lecciones generales, no de Avalonia. Control compartido: en copilot-avalonia es un lease de 120 segundos por defecto que pausa la entrada manual, y revocarlo no requiere permiso, así que el agente nunca puede dejarte fuera. Verificar: fill_control devuelve si el valor final coincide, y si una acción falla las que esperaban detrás se saltan. Limitar: JSON de 64 KiB, capturas de 80 MiB. Datos: la descripción del canvas le dice al agente que el contenido de la app no son instrucciones. Dos avisos prácticos: sesión nueva tras cada cambio de la extensión, y probar en la app, porque el modo prompt de la CLI 1.0.80 no expone las herramientas de canvas.</a:t>
+              <a:t>Thirty seconds. These are general lessons, not Avalonia ones. Shared control: in copilot-avalonia it is a 120-second lease by default that pauses manual input, and revoking it needs no permission, so the agent can never lock you out. Verify: fill_control returns whether the final value matches, and if an action fails the ones waiting behind it are skipped. Limit: 64 KiB JSON, 80 MiB screenshots. Data: the canvas description tells the agent that the app's content is not instructions. Two practical warnings: a new session after every change to the extension, and test in the app, because the CLI 1.0.80 prompt mode does not expose the canvas tools.</a:t>
             </a:r>
             <a:endParaRPr lang="en-US" dirty="0"/>
           </a:p>
@@ -3095,7 +3095,7 @@
           <a:p>
             <a:r>
               <a:rPr lang="en-US" dirty="0"/>
-              <a:t>Un minuto. Todo lo que hemos hecho vive en un repo y solo sirve a quien trabaja en él. Un plugin lo saca de ahí: lo instalas una vez y lo tienes en todos tus proyectos, o lo repartes a otros equipos. Un marketplace es simplemente un repo con un marketplace.json que lista plugins. En copilot-avalonia el mismo repo es el plugin y su marketplace, y su plugin.json usa la clave extensions para repartir la extensión con canvas. Para probar el del kit en local no instales desde la carpeta (esa forma está obsoleta): añade el repo como marketplace con copilot plugin marketplace add . e instala con copilot plugin install avalonia-kit@devdays-sevilla. El plugin se carga en vivo desde la carpeta, sin copiar nada.</a:t>
+              <a:t>One minute. Everything we have done lives in a repo and only serves whoever works in it. A plugin takes it out of there: you install it once and have it in all your projects, or you hand it to other teams. A marketplace is simply a repo with a marketplace.json that lists plugins. In copilot-avalonia the same repo is the plugin and its marketplace, and its plugin.json uses the extensions key to distribute the extension with the canvas. To try the kit's one locally, do not install from the folder (that form is deprecated): add the repo as a marketplace with copilot plugin marketplace add . and install with copilot plugin install avalonia-kit@devdays-sevilla. The plugin is loaded live from the folder, with nothing copied.</a:t>
             </a:r>
             <a:endParaRPr lang="en-US" dirty="0"/>
           </a:p>
@@ -3183,7 +3183,7 @@
           <a:p>
             <a:r>
               <a:rPr lang="en-US" dirty="0"/>
-              <a:t>Pasos: 1. En una terminal, desde la carpeta del kit: copilot plugin marketplace add . y después copilot plugin install avalonia-kit@devdays-sevilla. 2. En la app, sesión nueva en un proyecto sin skills ni agentes (el proyecto 00-baseline): «Use the /avalonia-automation-ids skill to review src/SampleApp.» 3. Después, para el agente: «Use the avalonia-ui-tester agent to design the test plan for SampleApp's main screen, in English.» Demo 10, tres minutos: en la versión 1.1.30 la skill tardó 37 segundos (incluye una compilación) y el agente otros 37. El instalador dice Installed 1 skill porque solo cuenta skills: el agente también se carga, con el nombre avalonia-kit:avalonia-ui-tester, y la app lo ejecuta como subagente. Al terminar, restablece: copilot plugin uninstall avalonia-kit y copilot plugin marketplace remove devdays-sevilla. Requisito para el público: los repos jsuarezruiz/copilot-avalonia y del kit tienen que ser públicos en GitHub para que cualquiera pueda añadirlos como marketplace. En qué fijarse en la captura: Loaded skill avalonia-automation-ids aunque el repo no tiene ninguna skill: llegó con el plugin, que se carga en vivo desde la carpeta del kit. Sale la misma tabla de cinco MenuItem de la demo 2. Respaldo de la demo 10: la captura images/demo10-plugin-agent.png muestra el agente del plugin trabajando como subagente (unos 30 segundos). Un plugin instalado vale para todos los proyectos, no solo para el repo donde lo probaste.</a:t>
+              <a:t>Steps: 1. In a terminal, from the kit's folder: copilot plugin marketplace add . and then copilot plugin install avalonia-kit@devdays-sevilla. 2. In the app, a new session in a project with no skills or agents (the 00-baseline project): “Use the /avalonia-automation-ids skill to review src/SampleApp.” 3. Then, for the agent: “Use the avalonia-ui-tester agent to design the test plan for SampleApp's main screen, in English.” Demo 10, three minutes: on version 1.1.30 the skill took 37 seconds (it includes a build) and the agent another 37. The installer says Installed 1 skill because it only counts skills: the agent is also loaded, with the name avalonia-kit:avalonia-ui-tester, and the app runs it as a subagent. When you finish, reset: copilot plugin uninstall avalonia-kit and copilot plugin marketplace remove devdays-sevilla. Requirement for the audience: the jsuarezruiz/copilot-avalonia repo and the kit's repo have to be public on GitHub for anybody to add them as a marketplace. What to look at in the screenshot: Loaded skill avalonia-automation-ids although the repo has no skill: it arrived with the plugin, which is loaded live from the kit's folder. The same table of five MenuItems from demo 2 comes out. Fallback for demo 10: the images/demo10-plugin-agent.png screenshot shows the plugin's agent working as a subagent (about 30 seconds). An installed plugin is valid for all projects, not only for the repo where you tried it.</a:t>
             </a:r>
             <a:endParaRPr lang="en-US" dirty="0"/>
           </a:p>
@@ -3271,7 +3271,7 @@
           <a:p>
             <a:r>
               <a:rPr lang="en-US" dirty="0"/>
-              <a:t>Treinta segundos, y es el cierre narrativo de la charla. Volvemos al prompt opcional de la demo 0, el del botón Clear. Al principio el agente editaba el código y poco más. Ahora, con las piezas cargadas, sigue las normas del repo y además verifica el resultado en la app real, sin que nadie se lo explique en el prompt: escribió Ada, obtuvo Hello, Ada!, pulsó Clear y comprobó que los dos controles quedaban vacíos. Ninguna pieza por separado hace esto. Juntas, sí.</a:t>
+              <a:t>Thirty seconds, and it is the narrative close of the talk. We go back to the optional prompt of demo 0, the Clear button one. At the beginning the agent edited the code and little else. Now, with the pieces loaded, it follows the repo's rules and also verifies the result in the real app, without anybody explaining it in the prompt: it typed Ada, got Hello, Ada!, pressed Clear and checked that both controls ended up empty. No single piece does this on its own. Together, they do.</a:t>
             </a:r>
             <a:endParaRPr lang="en-US" dirty="0"/>
           </a:p>
@@ -3359,7 +3359,7 @@
           <a:p>
             <a:r>
               <a:rPr lang="en-US" dirty="0"/>
-              <a:t>Un minuto, sin demo. Automatizaciones: están en la barra lateral de la app; son sesiones que se lanzan solas según un calendario y usan las mismas personalizaciones del repo. Copilot SDK: es el mismo paquete que usan las extensiones, pero desde fuera: tu programa arranca y dirige el agente. Hay SDK para Node, Python, Go, Rust y .NET. Políticas: en empresa, lo que un equipo puede instalar lo decide un administrador, y eso condiciona todo lo anterior.</a:t>
+              <a:t>One minute, no demo. Automations: they are in the app's sidebar; they are sessions that launch themselves on a schedule and use the same customizations of the repo. Copilot SDK: it is the same package the extensions use, but from the outside: your program starts and drives the agent. There are SDKs for Node, Python, Go, Rust and .NET. Policies: in a company, what a team can install is decided by an administrator, and that conditions everything before.</a:t>
             </a:r>
             <a:endParaRPr lang="en-US" dirty="0"/>
           </a:p>
@@ -3447,7 +3447,7 @@
           <a:p>
             <a:r>
               <a:rPr lang="en-US" dirty="0"/>
-              <a:t>Un minuto y medio. Enseña la ruta y la regla de la charla: cada paso añade una sola pieza al mismo repo y la probamos en directo. Del 1 al 6 son ficheros de texto, el 7 y el 8 son JavaScript con el SDK y el 9 es el empaquetado. Es la chuleta de la charla: no la leas entera. Señala dos cosas. Primera: todo cuelga de .github o de la raíz del repo, así que se revisa en un pull request como cualquier otro cambio. Segunda: la tabla va de menos a más poder y de menos a más riesgo. Las extensiones ejecutan código al abrir el repo, y por eso volveremos a hablar de seguridad al final. Dos caminos para casi todo: ficheros en el repo, que comparte el equipo, o los Ajustes de la app y ~/.copilot/, que son solo tuyos. En el paso 3 veremos cómo dar a cada agente su propio modelo y en el 7, cómo orquestarlos con código, al estilo de HydraFusion. Al final hay un bloque corto con lo que queda fuera de los nueve: automatizaciones, el SDK embebido y las políticas. El repo de ejemplo es una app Avalonia, pero es solo el escenario: ninguna pieza depende de la tecnología del proyecto.</a:t>
+              <a:t>A minute and a half. Show the route and the rule of the talk: each step adds a single piece to the same repo and we try it live. Steps 1 to 6 are text files, 7 and 8 are JavaScript with the SDK, and 9 is packaging. It is the cheat sheet of the talk: do not read it all. Point out two things. First: everything hangs from .github or from the root of the repo, so it is reviewed in a pull request like any other change. Second: the table goes from less to more power and from less to more risk. Extensions run code when the repo is opened, which is why we will talk about security again at the end. Two paths for almost everything: files in the repo, which the team shares, or the app Settings and ~/.copilot/, which are yours alone. In step 3 we will see how to give each agent its own model, and in step 7 how to orchestrate them with code, HydraFusion style. At the end there is a short block with what stays outside the nine: automations, the embedded SDK and policies. The sample repo is an Avalonia app, but it is only the stage: no piece depends on the technology of the project.</a:t>
             </a:r>
             <a:endParaRPr lang="en-US" dirty="0"/>
           </a:p>
@@ -3535,7 +3535,7 @@
           <a:p>
             <a:r>
               <a:rPr lang="en-US" dirty="0"/>
-              <a:t>Un minuto. Es la slide para la foto. Regla de uso: empieza por arriba y baja solo cuando la fila anterior se quede corta. La mayoría de equipos resuelve el ochenta por ciento con las tres primeras filas. Las combinaciones también cuentan: una skill que usa una herramienta MCP, un agente con un servidor propio, un canvas repartido en un plugin.</a:t>
+              <a:t>One minute. It is the slide for the photo. Rule of use: start at the top and go down only when the previous row falls short. Most teams solve eighty percent with the first three rows. Combinations count too: a skill that uses an MCP tool, an agent with a server of its own, a canvas distributed in a plugin.</a:t>
             </a:r>
             <a:endParaRPr lang="en-US" dirty="0"/>
           </a:p>
@@ -3623,7 +3623,7 @@
           <a:p>
             <a:r>
               <a:rPr lang="en-US" dirty="0"/>
-              <a:t>Cuarenta segundos. No es para asustar, es para usarlo con criterio. Las extensiones de .github/extensions son código que se ejecuta con tus permisos al abrir el proyecto. Los hooks también ejecutan comandos. Una skill o un plugin de terceros pueden traer instrucciones ocultas. Lo bueno es que todo es texto en un repo: se revisa en un pull request, se versiona y se puede auditar. En empresa, los administradores pueden limitar qué se instala.</a:t>
+              <a:t>Forty seconds. It is not meant to scare, it is meant to be used with judgement. The extensions in .github/extensions are code that runs with your permissions when you open the project. Hooks also run commands. A third-party skill or plugin can bring hidden instructions. The good thing is that everything is text in a repo: it is reviewed in a pull request, it is versioned and it can be audited. In a company, administrators can limit what gets installed.</a:t>
             </a:r>
             <a:endParaRPr lang="en-US" dirty="0"/>
           </a:p>
@@ -3711,7 +3711,7 @@
           <a:p>
             <a:r>
               <a:rPr lang="en-US" dirty="0"/>
-              <a:t>Cierre en veinte segundos y cinco minutos de preguntas. Mensaje final: no hace falta escribir un canvas para sacar partido a la extensibilidad. El mayor retorno está en los primeros escalones. Preguntas frecuentes para tener preparadas: diferencia entre MCP y extensiones, si esto vale también en VS Code y en la CLI, cuánto contexto consumen las instrucciones, y qué es estable y qué experimental (extensiones y canvas son experimentales).</a:t>
+              <a:t>Close in twenty seconds and five minutes of questions. Final message: you do not need to write a canvas to get the most out of extensibility. The biggest return is in the first steps. Frequently asked questions to have ready: difference between MCP and extensions, whether this also works in VS Code and in the CLI, how much context the instructions use, and what is stable and what is experimental (extensions and canvas are experimental).</a:t>
             </a:r>
             <a:endParaRPr lang="en-US" dirty="0"/>
           </a:p>
@@ -3799,7 +3799,7 @@
           <a:p>
             <a:r>
               <a:rPr lang="en-US" dirty="0"/>
-              <a:t>Un minuto. No es un editor: es el sitio desde el que lanzas y supervisas agentes. La última línea es la que importa para esta charla: casi todo lo que vamos a ver son ficheros dentro del repo, así que lo que extiendes para la app también vale para Copilot CLI, y viaja con el código al resto del equipo. Las extensiones y los canvas son todavía experimentales. Los canvas añaden superficies propias al panel lateral. A la derecha, el otro camino para extender: en lugar de ficheros en el repo, la página Customize de la app. Tiene un catálogo con elementos destacados y una pestaña por tipo: MCP, plugins, skills, extensiones y canvas. La pestaña Installed es útil para depurar: lista lo que está activo y su origen, personal, integrado o de un proyecto. En la captura se ve el botón Add arriba a la derecha para añadir cosas propias.</a:t>
+              <a:t>One minute. It is not an editor: it is the place from which you launch and supervise agents. The last line is the one that matters for this talk: almost everything we will see is files inside the repo, so whatever you extend for the app also works for Copilot CLI, and travels with the code to the rest of the team. Extensions and canvases are still experimental. Canvases add their own surfaces to the side panel. On the right, the other way to extend: instead of files in the repo, the app's Customize page. It has a catalog with featured items and one tab per type: MCP, plugins, skills, extensions and canvas. The Installed tab is useful for debugging: it lists what is active and where it comes from, personal, built-in or from a project. In the screenshot you can see the Add button at the top right to add your own things.</a:t>
             </a:r>
             <a:endParaRPr lang="en-US" dirty="0"/>
           </a:p>
@@ -3887,7 +3887,7 @@
           <a:p>
             <a:r>
               <a:rPr lang="en-US" dirty="0"/>
-              <a:t>Demo 0, dos minutos. Pregunta primero, sin tocar código: «What rules should I follow when I change the UI in this repo? Answer in at most five short bullets. If the repo states no rules, say so.». La última frase le pide que lo diga en vez de presentar como reglas lo que deduce del código (sin ella, a veces enumera convenciones inferidas del CSS). En el paso 0 el agente no encuentra reglas (no hay AGENTS.md, CLAUDE.md ni copilot-instructions.md) y contesta con consejos genéricos deducidos de la estructura de carpetas: una respuesta razonable que no conoce al equipo. Tarda unos 40 segundos, casi todo las dos confirmaciones de lectura que pide el agente. Segundo golpe, opcional: el botón Clear, el mismo prompt que cierra la charla. La ejecución tarda entre 30 segundos y dos minutos y medio; en las pruebas el botón ya salió con Name y AutomationId y a veces el agente ejecutó la app, así que no lo vendas como un mal resultado: que salga bien no es una garantía. Si vas justo de tiempo, enseña el resultado ya ejecutado (respaldo: demo0-rules.png y demo0-baseline.png). Vamos a ir cerrando esos huecos, de menos a más. Las slides claras como esta son siempre demos: en cada una está el prompt, lo que debe verse y el proyecto en el que se ejecuta.</a:t>
+              <a:t>Demo 0, two minutes. Question first, without touching code: “What rules should I follow when I change the UI in this repo? Answer in at most five short bullets. If the repo states no rules, say so.” The last sentence asks it to say so instead of presenting as rules what it infers from the code (without it, it sometimes lists conventions inferred from the CSS). In step 0 the agent finds no rules (there is no AGENTS.md, CLAUDE.md or copilot-instructions.md) and answers with generic advice inferred from the folder structure: a reasonable answer that does not know the team. It takes about 40 seconds, most of it the two read confirmations the agent asks for. Optional second beat: the Clear button, the same prompt that closes the talk. The run takes between 30 seconds and two and a half minutes; in testing the button already came out with Name and AutomationId and sometimes the agent ran the app, so do not sell it as a bad result: it coming out well is not a guarantee. If you are short of time, show the already executed result (fallback: demo0-rules.png and demo0-baseline.png). We will close those gaps one by one, from less to more. The light slides like this one are always demos: each one has the prompt, what you should see and the project it runs in.</a:t>
             </a:r>
             <a:endParaRPr lang="en-US" dirty="0"/>
           </a:p>
@@ -3975,7 +3975,7 @@
           <a:p>
             <a:r>
               <a:rPr lang="en-US" dirty="0"/>
-              <a:t>Un minuto de explicación; la demo es la slide siguiente. Las instrucciones son el escalón más barato y el que más devuelve. Regla práctica: si te has repetido dos veces en el chat, va a las instrucciones. Limitación que enlaza con el paso siguiente: todo lo que pongas aquí ocupa contexto en todas las sesiones, así que no metas procedimientos largos.</a:t>
+              <a:t>One minute of explanation; the demo is the next slide. Instructions are the cheapest step and the one that returns the most. Rule of thumb: if you have repeated yourself twice in the chat, it goes into the instructions. A limitation that leads into the next step: everything you put here takes up context in every session, so do not put long procedures in it.</a:t>
             </a:r>
             <a:endParaRPr lang="en-US" dirty="0"/>
           </a:p>
@@ -4063,7 +4063,7 @@
           <a:p>
             <a:r>
               <a:rPr lang="en-US" dirty="0"/>
-              <a:t>Demo 1, dos minutos. La misma pregunta (con la misma frase final, «If the repo states no rules, say so.», que aquí no cambia nada porque el repo sí declara reglas) y el mismo modelo, con otra respuesta: ahora el agente lista las reglas del equipo, y lo que cuenta es lo que la demo 0 no podía adivinar: ids en PascalCase que terminan con el tipo de control (GreetButton), no cambiar nunca un AutomationId existente, texto visible en inglés y el comando de compilación, además de Name y AutomationId iguales. Las lee de .github/copilot-instructions.md al empezar la sesión. Si en la demo 0 salió algo sobre AutomationId, era una pista de la documentación del repo, no una norma. Antes tenía que adivinar y ahora lo sabe, y eso es lo que hay que subrayar. Segundo golpe, opcional: el botón Clear. El código puede salir igual que en la demo 0, pero ahora es una norma del repo y no depende de la suerte. Respaldo: demo1-rules.png. Si el agente dice que no recibió instrucciones, comprueba que respondiste al aviso de confianza y abre una sesión nueva (véase demos/01-instructions.txt). Mensaje de cierre: las instrucciones sirven para normas, no para procedimientos. Para procedimientos, el siguiente escalón.</a:t>
+              <a:t>Demo 1, two minutes. The same question (with the same final sentence, “If the repo states no rules, say so.”, which changes nothing here because the repo does declare rules) and the same model, with a different answer: now the agent lists the team's rules, and what counts is what demo 0 could not guess: PascalCase ids that end with the control type (GreetButton), never changing an existing AutomationId, visible text in English and the build command, besides Name and AutomationId being equal. It reads them from .github/copilot-instructions.md at the start of the session. If demo 0 said something about AutomationId, it was a hint from the repo's documentation, not a rule. Before, it had to guess and now it knows, and that is what to underline. Optional second beat: the Clear button. The code may come out the same as in demo 0, but now it is a rule of the repo and does not depend on luck. Fallback: demo1-rules.png. If the agent says it received no instructions, check that you answered the trust prompt and open a new session (see demos/01-instructions.txt). Closing message: instructions are for rules, not for procedures. For procedures, the next step.</a:t>
             </a:r>
             <a:endParaRPr lang="en-US" dirty="0"/>
           </a:p>
@@ -4151,7 +4151,7 @@
           <a:p>
             <a:r>
               <a:rPr lang="en-US" dirty="0"/>
-              <a:t>Un minuto. La descripción es lo más importante de una skill: es lo único que el agente ve de entrada y decide cuándo se usa. Por eso dice qué hace y cuándo usarla. El cuerpo es un procedimiento con verificación al final. Diferencia con las instrucciones: no ocupa contexto mientras no se necesita. Las skills siguen un formato abierto, así que también valen en otras herramientas de agentes.</a:t>
+              <a:t>One minute. The description is the most important part of a skill: it is the only thing the agent sees at first and it decides when the skill is used. That is why it says what it does and when to use it. The body is a procedure with a verification at the end. Difference from instructions: it takes up no context while it is not needed. Skills follow an open format, so they also work in other agent tools.</a:t>
             </a:r>
             <a:endParaRPr lang="en-US" dirty="0"/>
           </a:p>
